--- a/尊貴全能神(崇拜版).pptx
+++ b/尊貴全能神(崇拜版).pptx
@@ -16,6 +16,7 @@
     <p:sldId id="269" r:id="rId10"/>
     <p:sldId id="270" r:id="rId11"/>
     <p:sldId id="271" r:id="rId12"/>
+    <p:sldId id="272" r:id="rId13"/>
   </p:sldIdLst>
   <p:sldSz cx="9144000" cy="5143500" type="screen16x9"/>
   <p:notesSz cx="6858000" cy="9144000"/>
@@ -171,10 +172,9 @@
           <a:lstStyle/>
           <a:p>
             <a:r>
-              <a:rPr lang="zh-TW" altLang="en-US" smtClean="0"/>
+              <a:rPr lang="zh-TW" altLang="en-US"/>
               <a:t>按一下以編輯母片標題樣式</a:t>
             </a:r>
-            <a:endParaRPr lang="zh-TW" altLang="en-US"/>
           </a:p>
         </p:txBody>
       </p:sp>
@@ -290,10 +290,9 @@
           </a:lstStyle>
           <a:p>
             <a:r>
-              <a:rPr lang="zh-TW" altLang="en-US" smtClean="0"/>
+              <a:rPr lang="zh-TW" altLang="en-US"/>
               <a:t>按一下以編輯母片副標題樣式</a:t>
             </a:r>
-            <a:endParaRPr lang="zh-TW" altLang="en-US"/>
           </a:p>
         </p:txBody>
       </p:sp>
@@ -314,7 +313,7 @@
           <a:p>
             <a:fld id="{886D2C6C-F116-448E-A79A-9A454AEBD3FD}" type="datetimeFigureOut">
               <a:rPr lang="zh-TW" altLang="en-US" smtClean="0"/>
-              <a:t>2022/2/2</a:t>
+              <a:t>2025/7/19</a:t>
             </a:fld>
             <a:endParaRPr lang="zh-TW" altLang="en-US"/>
           </a:p>
@@ -403,10 +402,9 @@
           <a:lstStyle/>
           <a:p>
             <a:r>
-              <a:rPr lang="zh-TW" altLang="en-US" smtClean="0"/>
+              <a:rPr lang="zh-TW" altLang="en-US"/>
               <a:t>按一下以編輯母片標題樣式</a:t>
             </a:r>
-            <a:endParaRPr lang="zh-TW" altLang="en-US"/>
           </a:p>
         </p:txBody>
       </p:sp>
@@ -427,38 +425,37 @@
           <a:p>
             <a:pPr lvl="0"/>
             <a:r>
-              <a:rPr lang="zh-TW" altLang="en-US" smtClean="0"/>
+              <a:rPr lang="zh-TW" altLang="en-US"/>
               <a:t>按一下以編輯母片文字樣式</a:t>
             </a:r>
           </a:p>
           <a:p>
             <a:pPr lvl="1"/>
             <a:r>
-              <a:rPr lang="zh-TW" altLang="en-US" smtClean="0"/>
+              <a:rPr lang="zh-TW" altLang="en-US"/>
               <a:t>第二層</a:t>
             </a:r>
           </a:p>
           <a:p>
             <a:pPr lvl="2"/>
             <a:r>
-              <a:rPr lang="zh-TW" altLang="en-US" smtClean="0"/>
+              <a:rPr lang="zh-TW" altLang="en-US"/>
               <a:t>第三層</a:t>
             </a:r>
           </a:p>
           <a:p>
             <a:pPr lvl="3"/>
             <a:r>
-              <a:rPr lang="zh-TW" altLang="en-US" smtClean="0"/>
+              <a:rPr lang="zh-TW" altLang="en-US"/>
               <a:t>第四層</a:t>
             </a:r>
           </a:p>
           <a:p>
             <a:pPr lvl="4"/>
             <a:r>
-              <a:rPr lang="zh-TW" altLang="en-US" smtClean="0"/>
+              <a:rPr lang="zh-TW" altLang="en-US"/>
               <a:t>第五層</a:t>
             </a:r>
-            <a:endParaRPr lang="zh-TW" altLang="en-US"/>
           </a:p>
         </p:txBody>
       </p:sp>
@@ -479,7 +476,7 @@
           <a:p>
             <a:fld id="{886D2C6C-F116-448E-A79A-9A454AEBD3FD}" type="datetimeFigureOut">
               <a:rPr lang="zh-TW" altLang="en-US" smtClean="0"/>
-              <a:t>2022/2/2</a:t>
+              <a:t>2025/7/19</a:t>
             </a:fld>
             <a:endParaRPr lang="zh-TW" altLang="en-US"/>
           </a:p>
@@ -573,10 +570,9 @@
           <a:lstStyle/>
           <a:p>
             <a:r>
-              <a:rPr lang="zh-TW" altLang="en-US" smtClean="0"/>
+              <a:rPr lang="zh-TW" altLang="en-US"/>
               <a:t>按一下以編輯母片標題樣式</a:t>
             </a:r>
-            <a:endParaRPr lang="zh-TW" altLang="en-US"/>
           </a:p>
         </p:txBody>
       </p:sp>
@@ -602,38 +598,37 @@
           <a:p>
             <a:pPr lvl="0"/>
             <a:r>
-              <a:rPr lang="zh-TW" altLang="en-US" smtClean="0"/>
+              <a:rPr lang="zh-TW" altLang="en-US"/>
               <a:t>按一下以編輯母片文字樣式</a:t>
             </a:r>
           </a:p>
           <a:p>
             <a:pPr lvl="1"/>
             <a:r>
-              <a:rPr lang="zh-TW" altLang="en-US" smtClean="0"/>
+              <a:rPr lang="zh-TW" altLang="en-US"/>
               <a:t>第二層</a:t>
             </a:r>
           </a:p>
           <a:p>
             <a:pPr lvl="2"/>
             <a:r>
-              <a:rPr lang="zh-TW" altLang="en-US" smtClean="0"/>
+              <a:rPr lang="zh-TW" altLang="en-US"/>
               <a:t>第三層</a:t>
             </a:r>
           </a:p>
           <a:p>
             <a:pPr lvl="3"/>
             <a:r>
-              <a:rPr lang="zh-TW" altLang="en-US" smtClean="0"/>
+              <a:rPr lang="zh-TW" altLang="en-US"/>
               <a:t>第四層</a:t>
             </a:r>
           </a:p>
           <a:p>
             <a:pPr lvl="4"/>
             <a:r>
-              <a:rPr lang="zh-TW" altLang="en-US" smtClean="0"/>
+              <a:rPr lang="zh-TW" altLang="en-US"/>
               <a:t>第五層</a:t>
             </a:r>
-            <a:endParaRPr lang="zh-TW" altLang="en-US"/>
           </a:p>
         </p:txBody>
       </p:sp>
@@ -654,7 +649,7 @@
           <a:p>
             <a:fld id="{886D2C6C-F116-448E-A79A-9A454AEBD3FD}" type="datetimeFigureOut">
               <a:rPr lang="zh-TW" altLang="en-US" smtClean="0"/>
-              <a:t>2022/2/2</a:t>
+              <a:t>2025/7/19</a:t>
             </a:fld>
             <a:endParaRPr lang="zh-TW" altLang="en-US"/>
           </a:p>
@@ -743,10 +738,9 @@
           <a:lstStyle/>
           <a:p>
             <a:r>
-              <a:rPr lang="zh-TW" altLang="en-US" smtClean="0"/>
+              <a:rPr lang="zh-TW" altLang="en-US"/>
               <a:t>按一下以編輯母片標題樣式</a:t>
             </a:r>
-            <a:endParaRPr lang="zh-TW" altLang="en-US"/>
           </a:p>
         </p:txBody>
       </p:sp>
@@ -767,38 +761,37 @@
           <a:p>
             <a:pPr lvl="0"/>
             <a:r>
-              <a:rPr lang="zh-TW" altLang="en-US" smtClean="0"/>
+              <a:rPr lang="zh-TW" altLang="en-US"/>
               <a:t>按一下以編輯母片文字樣式</a:t>
             </a:r>
           </a:p>
           <a:p>
             <a:pPr lvl="1"/>
             <a:r>
-              <a:rPr lang="zh-TW" altLang="en-US" smtClean="0"/>
+              <a:rPr lang="zh-TW" altLang="en-US"/>
               <a:t>第二層</a:t>
             </a:r>
           </a:p>
           <a:p>
             <a:pPr lvl="2"/>
             <a:r>
-              <a:rPr lang="zh-TW" altLang="en-US" smtClean="0"/>
+              <a:rPr lang="zh-TW" altLang="en-US"/>
               <a:t>第三層</a:t>
             </a:r>
           </a:p>
           <a:p>
             <a:pPr lvl="3"/>
             <a:r>
-              <a:rPr lang="zh-TW" altLang="en-US" smtClean="0"/>
+              <a:rPr lang="zh-TW" altLang="en-US"/>
               <a:t>第四層</a:t>
             </a:r>
           </a:p>
           <a:p>
             <a:pPr lvl="4"/>
             <a:r>
-              <a:rPr lang="zh-TW" altLang="en-US" smtClean="0"/>
+              <a:rPr lang="zh-TW" altLang="en-US"/>
               <a:t>第五層</a:t>
             </a:r>
-            <a:endParaRPr lang="zh-TW" altLang="en-US"/>
           </a:p>
         </p:txBody>
       </p:sp>
@@ -819,7 +812,7 @@
           <a:p>
             <a:fld id="{886D2C6C-F116-448E-A79A-9A454AEBD3FD}" type="datetimeFigureOut">
               <a:rPr lang="zh-TW" altLang="en-US" smtClean="0"/>
-              <a:t>2022/2/2</a:t>
+              <a:t>2025/7/19</a:t>
             </a:fld>
             <a:endParaRPr lang="zh-TW" altLang="en-US"/>
           </a:p>
@@ -917,10 +910,9 @@
           </a:lstStyle>
           <a:p>
             <a:r>
-              <a:rPr lang="zh-TW" altLang="en-US" smtClean="0"/>
+              <a:rPr lang="zh-TW" altLang="en-US"/>
               <a:t>按一下以編輯母片標題樣式</a:t>
             </a:r>
-            <a:endParaRPr lang="zh-TW" altLang="en-US"/>
           </a:p>
         </p:txBody>
       </p:sp>
@@ -1037,7 +1029,7 @@
           <a:p>
             <a:pPr lvl="0"/>
             <a:r>
-              <a:rPr lang="zh-TW" altLang="en-US" smtClean="0"/>
+              <a:rPr lang="zh-TW" altLang="en-US"/>
               <a:t>按一下以編輯母片文字樣式</a:t>
             </a:r>
           </a:p>
@@ -1060,7 +1052,7 @@
           <a:p>
             <a:fld id="{886D2C6C-F116-448E-A79A-9A454AEBD3FD}" type="datetimeFigureOut">
               <a:rPr lang="zh-TW" altLang="en-US" smtClean="0"/>
-              <a:t>2022/2/2</a:t>
+              <a:t>2025/7/19</a:t>
             </a:fld>
             <a:endParaRPr lang="zh-TW" altLang="en-US"/>
           </a:p>
@@ -1149,10 +1141,9 @@
           <a:lstStyle/>
           <a:p>
             <a:r>
-              <a:rPr lang="zh-TW" altLang="en-US" smtClean="0"/>
+              <a:rPr lang="zh-TW" altLang="en-US"/>
               <a:t>按一下以編輯母片標題樣式</a:t>
             </a:r>
-            <a:endParaRPr lang="zh-TW" altLang="en-US"/>
           </a:p>
         </p:txBody>
       </p:sp>
@@ -1206,38 +1197,37 @@
           <a:p>
             <a:pPr lvl="0"/>
             <a:r>
-              <a:rPr lang="zh-TW" altLang="en-US" smtClean="0"/>
+              <a:rPr lang="zh-TW" altLang="en-US"/>
               <a:t>按一下以編輯母片文字樣式</a:t>
             </a:r>
           </a:p>
           <a:p>
             <a:pPr lvl="1"/>
             <a:r>
-              <a:rPr lang="zh-TW" altLang="en-US" smtClean="0"/>
+              <a:rPr lang="zh-TW" altLang="en-US"/>
               <a:t>第二層</a:t>
             </a:r>
           </a:p>
           <a:p>
             <a:pPr lvl="2"/>
             <a:r>
-              <a:rPr lang="zh-TW" altLang="en-US" smtClean="0"/>
+              <a:rPr lang="zh-TW" altLang="en-US"/>
               <a:t>第三層</a:t>
             </a:r>
           </a:p>
           <a:p>
             <a:pPr lvl="3"/>
             <a:r>
-              <a:rPr lang="zh-TW" altLang="en-US" smtClean="0"/>
+              <a:rPr lang="zh-TW" altLang="en-US"/>
               <a:t>第四層</a:t>
             </a:r>
           </a:p>
           <a:p>
             <a:pPr lvl="4"/>
             <a:r>
-              <a:rPr lang="zh-TW" altLang="en-US" smtClean="0"/>
+              <a:rPr lang="zh-TW" altLang="en-US"/>
               <a:t>第五層</a:t>
             </a:r>
-            <a:endParaRPr lang="zh-TW" altLang="en-US"/>
           </a:p>
         </p:txBody>
       </p:sp>
@@ -1291,38 +1281,37 @@
           <a:p>
             <a:pPr lvl="0"/>
             <a:r>
-              <a:rPr lang="zh-TW" altLang="en-US" smtClean="0"/>
+              <a:rPr lang="zh-TW" altLang="en-US"/>
               <a:t>按一下以編輯母片文字樣式</a:t>
             </a:r>
           </a:p>
           <a:p>
             <a:pPr lvl="1"/>
             <a:r>
-              <a:rPr lang="zh-TW" altLang="en-US" smtClean="0"/>
+              <a:rPr lang="zh-TW" altLang="en-US"/>
               <a:t>第二層</a:t>
             </a:r>
           </a:p>
           <a:p>
             <a:pPr lvl="2"/>
             <a:r>
-              <a:rPr lang="zh-TW" altLang="en-US" smtClean="0"/>
+              <a:rPr lang="zh-TW" altLang="en-US"/>
               <a:t>第三層</a:t>
             </a:r>
           </a:p>
           <a:p>
             <a:pPr lvl="3"/>
             <a:r>
-              <a:rPr lang="zh-TW" altLang="en-US" smtClean="0"/>
+              <a:rPr lang="zh-TW" altLang="en-US"/>
               <a:t>第四層</a:t>
             </a:r>
           </a:p>
           <a:p>
             <a:pPr lvl="4"/>
             <a:r>
-              <a:rPr lang="zh-TW" altLang="en-US" smtClean="0"/>
+              <a:rPr lang="zh-TW" altLang="en-US"/>
               <a:t>第五層</a:t>
             </a:r>
-            <a:endParaRPr lang="zh-TW" altLang="en-US"/>
           </a:p>
         </p:txBody>
       </p:sp>
@@ -1343,7 +1332,7 @@
           <a:p>
             <a:fld id="{886D2C6C-F116-448E-A79A-9A454AEBD3FD}" type="datetimeFigureOut">
               <a:rPr lang="zh-TW" altLang="en-US" smtClean="0"/>
-              <a:t>2022/2/2</a:t>
+              <a:t>2025/7/19</a:t>
             </a:fld>
             <a:endParaRPr lang="zh-TW" altLang="en-US"/>
           </a:p>
@@ -1436,10 +1425,9 @@
           </a:lstStyle>
           <a:p>
             <a:r>
-              <a:rPr lang="zh-TW" altLang="en-US" smtClean="0"/>
+              <a:rPr lang="zh-TW" altLang="en-US"/>
               <a:t>按一下以編輯母片標題樣式</a:t>
             </a:r>
-            <a:endParaRPr lang="zh-TW" altLang="en-US"/>
           </a:p>
         </p:txBody>
       </p:sp>
@@ -1502,7 +1490,7 @@
           <a:p>
             <a:pPr lvl="0"/>
             <a:r>
-              <a:rPr lang="zh-TW" altLang="en-US" smtClean="0"/>
+              <a:rPr lang="zh-TW" altLang="en-US"/>
               <a:t>按一下以編輯母片文字樣式</a:t>
             </a:r>
           </a:p>
@@ -1558,38 +1546,37 @@
           <a:p>
             <a:pPr lvl="0"/>
             <a:r>
-              <a:rPr lang="zh-TW" altLang="en-US" smtClean="0"/>
+              <a:rPr lang="zh-TW" altLang="en-US"/>
               <a:t>按一下以編輯母片文字樣式</a:t>
             </a:r>
           </a:p>
           <a:p>
             <a:pPr lvl="1"/>
             <a:r>
-              <a:rPr lang="zh-TW" altLang="en-US" smtClean="0"/>
+              <a:rPr lang="zh-TW" altLang="en-US"/>
               <a:t>第二層</a:t>
             </a:r>
           </a:p>
           <a:p>
             <a:pPr lvl="2"/>
             <a:r>
-              <a:rPr lang="zh-TW" altLang="en-US" smtClean="0"/>
+              <a:rPr lang="zh-TW" altLang="en-US"/>
               <a:t>第三層</a:t>
             </a:r>
           </a:p>
           <a:p>
             <a:pPr lvl="3"/>
             <a:r>
-              <a:rPr lang="zh-TW" altLang="en-US" smtClean="0"/>
+              <a:rPr lang="zh-TW" altLang="en-US"/>
               <a:t>第四層</a:t>
             </a:r>
           </a:p>
           <a:p>
             <a:pPr lvl="4"/>
             <a:r>
-              <a:rPr lang="zh-TW" altLang="en-US" smtClean="0"/>
+              <a:rPr lang="zh-TW" altLang="en-US"/>
               <a:t>第五層</a:t>
             </a:r>
-            <a:endParaRPr lang="zh-TW" altLang="en-US"/>
           </a:p>
         </p:txBody>
       </p:sp>
@@ -1652,7 +1639,7 @@
           <a:p>
             <a:pPr lvl="0"/>
             <a:r>
-              <a:rPr lang="zh-TW" altLang="en-US" smtClean="0"/>
+              <a:rPr lang="zh-TW" altLang="en-US"/>
               <a:t>按一下以編輯母片文字樣式</a:t>
             </a:r>
           </a:p>
@@ -1708,38 +1695,37 @@
           <a:p>
             <a:pPr lvl="0"/>
             <a:r>
-              <a:rPr lang="zh-TW" altLang="en-US" smtClean="0"/>
+              <a:rPr lang="zh-TW" altLang="en-US"/>
               <a:t>按一下以編輯母片文字樣式</a:t>
             </a:r>
           </a:p>
           <a:p>
             <a:pPr lvl="1"/>
             <a:r>
-              <a:rPr lang="zh-TW" altLang="en-US" smtClean="0"/>
+              <a:rPr lang="zh-TW" altLang="en-US"/>
               <a:t>第二層</a:t>
             </a:r>
           </a:p>
           <a:p>
             <a:pPr lvl="2"/>
             <a:r>
-              <a:rPr lang="zh-TW" altLang="en-US" smtClean="0"/>
+              <a:rPr lang="zh-TW" altLang="en-US"/>
               <a:t>第三層</a:t>
             </a:r>
           </a:p>
           <a:p>
             <a:pPr lvl="3"/>
             <a:r>
-              <a:rPr lang="zh-TW" altLang="en-US" smtClean="0"/>
+              <a:rPr lang="zh-TW" altLang="en-US"/>
               <a:t>第四層</a:t>
             </a:r>
           </a:p>
           <a:p>
             <a:pPr lvl="4"/>
             <a:r>
-              <a:rPr lang="zh-TW" altLang="en-US" smtClean="0"/>
+              <a:rPr lang="zh-TW" altLang="en-US"/>
               <a:t>第五層</a:t>
             </a:r>
-            <a:endParaRPr lang="zh-TW" altLang="en-US"/>
           </a:p>
         </p:txBody>
       </p:sp>
@@ -1760,7 +1746,7 @@
           <a:p>
             <a:fld id="{886D2C6C-F116-448E-A79A-9A454AEBD3FD}" type="datetimeFigureOut">
               <a:rPr lang="zh-TW" altLang="en-US" smtClean="0"/>
-              <a:t>2022/2/2</a:t>
+              <a:t>2025/7/19</a:t>
             </a:fld>
             <a:endParaRPr lang="zh-TW" altLang="en-US"/>
           </a:p>
@@ -1849,10 +1835,9 @@
           <a:lstStyle/>
           <a:p>
             <a:r>
-              <a:rPr lang="zh-TW" altLang="en-US" smtClean="0"/>
+              <a:rPr lang="zh-TW" altLang="en-US"/>
               <a:t>按一下以編輯母片標題樣式</a:t>
             </a:r>
-            <a:endParaRPr lang="zh-TW" altLang="en-US"/>
           </a:p>
         </p:txBody>
       </p:sp>
@@ -1873,7 +1858,7 @@
           <a:p>
             <a:fld id="{886D2C6C-F116-448E-A79A-9A454AEBD3FD}" type="datetimeFigureOut">
               <a:rPr lang="zh-TW" altLang="en-US" smtClean="0"/>
-              <a:t>2022/2/2</a:t>
+              <a:t>2025/7/19</a:t>
             </a:fld>
             <a:endParaRPr lang="zh-TW" altLang="en-US"/>
           </a:p>
@@ -1963,7 +1948,7 @@
           <a:p>
             <a:fld id="{886D2C6C-F116-448E-A79A-9A454AEBD3FD}" type="datetimeFigureOut">
               <a:rPr lang="zh-TW" altLang="en-US" smtClean="0"/>
-              <a:t>2022/2/2</a:t>
+              <a:t>2025/7/19</a:t>
             </a:fld>
             <a:endParaRPr lang="zh-TW" altLang="en-US"/>
           </a:p>
@@ -2061,10 +2046,9 @@
           </a:lstStyle>
           <a:p>
             <a:r>
-              <a:rPr lang="zh-TW" altLang="en-US" smtClean="0"/>
+              <a:rPr lang="zh-TW" altLang="en-US"/>
               <a:t>按一下以編輯母片標題樣式</a:t>
             </a:r>
-            <a:endParaRPr lang="zh-TW" altLang="en-US"/>
           </a:p>
         </p:txBody>
       </p:sp>
@@ -2118,38 +2102,37 @@
           <a:p>
             <a:pPr lvl="0"/>
             <a:r>
-              <a:rPr lang="zh-TW" altLang="en-US" smtClean="0"/>
+              <a:rPr lang="zh-TW" altLang="en-US"/>
               <a:t>按一下以編輯母片文字樣式</a:t>
             </a:r>
           </a:p>
           <a:p>
             <a:pPr lvl="1"/>
             <a:r>
-              <a:rPr lang="zh-TW" altLang="en-US" smtClean="0"/>
+              <a:rPr lang="zh-TW" altLang="en-US"/>
               <a:t>第二層</a:t>
             </a:r>
           </a:p>
           <a:p>
             <a:pPr lvl="2"/>
             <a:r>
-              <a:rPr lang="zh-TW" altLang="en-US" smtClean="0"/>
+              <a:rPr lang="zh-TW" altLang="en-US"/>
               <a:t>第三層</a:t>
             </a:r>
           </a:p>
           <a:p>
             <a:pPr lvl="3"/>
             <a:r>
-              <a:rPr lang="zh-TW" altLang="en-US" smtClean="0"/>
+              <a:rPr lang="zh-TW" altLang="en-US"/>
               <a:t>第四層</a:t>
             </a:r>
           </a:p>
           <a:p>
             <a:pPr lvl="4"/>
             <a:r>
-              <a:rPr lang="zh-TW" altLang="en-US" smtClean="0"/>
+              <a:rPr lang="zh-TW" altLang="en-US"/>
               <a:t>第五層</a:t>
             </a:r>
-            <a:endParaRPr lang="zh-TW" altLang="en-US"/>
           </a:p>
         </p:txBody>
       </p:sp>
@@ -2212,7 +2195,7 @@
           <a:p>
             <a:pPr lvl="0"/>
             <a:r>
-              <a:rPr lang="zh-TW" altLang="en-US" smtClean="0"/>
+              <a:rPr lang="zh-TW" altLang="en-US"/>
               <a:t>按一下以編輯母片文字樣式</a:t>
             </a:r>
           </a:p>
@@ -2235,7 +2218,7 @@
           <a:p>
             <a:fld id="{886D2C6C-F116-448E-A79A-9A454AEBD3FD}" type="datetimeFigureOut">
               <a:rPr lang="zh-TW" altLang="en-US" smtClean="0"/>
-              <a:t>2022/2/2</a:t>
+              <a:t>2025/7/19</a:t>
             </a:fld>
             <a:endParaRPr lang="zh-TW" altLang="en-US"/>
           </a:p>
@@ -2333,10 +2316,9 @@
           </a:lstStyle>
           <a:p>
             <a:r>
-              <a:rPr lang="zh-TW" altLang="en-US" smtClean="0"/>
+              <a:rPr lang="zh-TW" altLang="en-US"/>
               <a:t>按一下以編輯母片標題樣式</a:t>
             </a:r>
-            <a:endParaRPr lang="zh-TW" altLang="en-US"/>
           </a:p>
         </p:txBody>
       </p:sp>
@@ -2398,10 +2380,9 @@
           </a:lstStyle>
           <a:p>
             <a:r>
-              <a:rPr lang="zh-TW" altLang="en-US" smtClean="0"/>
+              <a:rPr lang="zh-TW" altLang="en-US"/>
               <a:t>按一下圖示以新增圖片</a:t>
             </a:r>
-            <a:endParaRPr lang="zh-TW" altLang="en-US"/>
           </a:p>
         </p:txBody>
       </p:sp>
@@ -2464,7 +2445,7 @@
           <a:p>
             <a:pPr lvl="0"/>
             <a:r>
-              <a:rPr lang="zh-TW" altLang="en-US" smtClean="0"/>
+              <a:rPr lang="zh-TW" altLang="en-US"/>
               <a:t>按一下以編輯母片文字樣式</a:t>
             </a:r>
           </a:p>
@@ -2487,7 +2468,7 @@
           <a:p>
             <a:fld id="{886D2C6C-F116-448E-A79A-9A454AEBD3FD}" type="datetimeFigureOut">
               <a:rPr lang="zh-TW" altLang="en-US" smtClean="0"/>
-              <a:t>2022/2/2</a:t>
+              <a:t>2025/7/19</a:t>
             </a:fld>
             <a:endParaRPr lang="zh-TW" altLang="en-US"/>
           </a:p>
@@ -2596,10 +2577,9 @@
           <a:lstStyle/>
           <a:p>
             <a:r>
-              <a:rPr lang="zh-TW" altLang="en-US" smtClean="0"/>
+              <a:rPr lang="zh-TW" altLang="en-US"/>
               <a:t>按一下以編輯母片標題樣式</a:t>
             </a:r>
-            <a:endParaRPr lang="zh-TW" altLang="en-US"/>
           </a:p>
         </p:txBody>
       </p:sp>
@@ -2630,38 +2610,37 @@
           <a:p>
             <a:pPr lvl="0"/>
             <a:r>
-              <a:rPr lang="zh-TW" altLang="en-US" smtClean="0"/>
+              <a:rPr lang="zh-TW" altLang="en-US"/>
               <a:t>按一下以編輯母片文字樣式</a:t>
             </a:r>
           </a:p>
           <a:p>
             <a:pPr lvl="1"/>
             <a:r>
-              <a:rPr lang="zh-TW" altLang="en-US" smtClean="0"/>
+              <a:rPr lang="zh-TW" altLang="en-US"/>
               <a:t>第二層</a:t>
             </a:r>
           </a:p>
           <a:p>
             <a:pPr lvl="2"/>
             <a:r>
-              <a:rPr lang="zh-TW" altLang="en-US" smtClean="0"/>
+              <a:rPr lang="zh-TW" altLang="en-US"/>
               <a:t>第三層</a:t>
             </a:r>
           </a:p>
           <a:p>
             <a:pPr lvl="3"/>
             <a:r>
-              <a:rPr lang="zh-TW" altLang="en-US" smtClean="0"/>
+              <a:rPr lang="zh-TW" altLang="en-US"/>
               <a:t>第四層</a:t>
             </a:r>
           </a:p>
           <a:p>
             <a:pPr lvl="4"/>
             <a:r>
-              <a:rPr lang="zh-TW" altLang="en-US" smtClean="0"/>
+              <a:rPr lang="zh-TW" altLang="en-US"/>
               <a:t>第五層</a:t>
             </a:r>
-            <a:endParaRPr lang="zh-TW" altLang="en-US"/>
           </a:p>
         </p:txBody>
       </p:sp>
@@ -2700,7 +2679,7 @@
           <a:p>
             <a:fld id="{886D2C6C-F116-448E-A79A-9A454AEBD3FD}" type="datetimeFigureOut">
               <a:rPr lang="zh-TW" altLang="en-US" smtClean="0"/>
-              <a:t>2022/2/2</a:t>
+              <a:t>2025/7/19</a:t>
             </a:fld>
             <a:endParaRPr lang="zh-TW" altLang="en-US"/>
           </a:p>
@@ -3093,7 +3072,7 @@
           <a:lstStyle/>
           <a:p>
             <a:r>
-              <a:rPr lang="zh-TW" altLang="en-US" sz="5400" b="1" i="1" dirty="0" smtClean="0">
+              <a:rPr lang="zh-TW" altLang="en-US" sz="5400" b="1" i="1" dirty="0">
                 <a:solidFill>
                   <a:srgbClr val="660033"/>
                 </a:solidFill>
@@ -3109,20 +3088,6 @@
               </a:rPr>
               <a:t>尊貴全能神</a:t>
             </a:r>
-            <a:endParaRPr lang="zh-TW" altLang="en-US" sz="5400" b="1" i="1" dirty="0">
-              <a:solidFill>
-                <a:srgbClr val="660033"/>
-              </a:solidFill>
-              <a:effectLst>
-                <a:outerShdw blurRad="38100" dist="38100" dir="2700000" algn="tl">
-                  <a:srgbClr val="000000">
-                    <a:alpha val="43137"/>
-                  </a:srgbClr>
-                </a:outerShdw>
-              </a:effectLst>
-              <a:latin typeface="微軟正黑體" pitchFamily="34" charset="-120"/>
-              <a:ea typeface="微軟正黑體" pitchFamily="34" charset="-120"/>
-            </a:endParaRPr>
           </a:p>
         </p:txBody>
       </p:sp>
@@ -3259,7 +3224,7 @@
               <a:t>( </a:t>
             </a:r>
             <a:r>
-              <a:rPr lang="zh-CN" altLang="en-US" sz="3600" b="1" dirty="0" smtClean="0">
+              <a:rPr lang="zh-CN" altLang="en-US" sz="3600" b="1" dirty="0">
                 <a:solidFill>
                   <a:srgbClr val="660033"/>
                 </a:solidFill>
@@ -3381,13 +3346,6 @@
               </a:rPr>
               <a:t>高舉祢榮耀的名</a:t>
             </a:r>
-            <a:endParaRPr lang="zh-TW" altLang="en-US" sz="4800" b="1" dirty="0">
-              <a:solidFill>
-                <a:srgbClr val="660033"/>
-              </a:solidFill>
-              <a:latin typeface="微軟正黑體" pitchFamily="34" charset="-120"/>
-              <a:ea typeface="微軟正黑體" pitchFamily="34" charset="-120"/>
-            </a:endParaRPr>
           </a:p>
         </p:txBody>
       </p:sp>
@@ -3427,7 +3385,7 @@
               <a:t>( </a:t>
             </a:r>
             <a:r>
-              <a:rPr lang="zh-CN" altLang="en-US" sz="3600" b="1" dirty="0" smtClean="0">
+              <a:rPr lang="zh-CN" altLang="en-US" sz="3600" b="1" dirty="0">
                 <a:solidFill>
                   <a:srgbClr val="660033"/>
                 </a:solidFill>
@@ -3466,6 +3424,192 @@
     <p:extLst>
       <p:ext uri="{BB962C8B-B14F-4D97-AF65-F5344CB8AC3E}">
         <p14:creationId xmlns:p14="http://schemas.microsoft.com/office/powerpoint/2010/main" val="767825228"/>
+      </p:ext>
+    </p:extLst>
+  </p:cSld>
+  <p:clrMapOvr>
+    <a:masterClrMapping/>
+  </p:clrMapOvr>
+</p:sld>
+</file>
+
+<file path=ppt/slides/slide12.xml><?xml version="1.0" encoding="utf-8"?>
+<p:sld xmlns:a="http://schemas.openxmlformats.org/drawingml/2006/main" xmlns:r="http://schemas.openxmlformats.org/officeDocument/2006/relationships" xmlns:p="http://schemas.openxmlformats.org/presentationml/2006/main">
+  <p:cSld>
+    <p:spTree>
+      <p:nvGrpSpPr>
+        <p:cNvPr id="1" name="">
+          <a:extLst>
+            <a:ext uri="{FF2B5EF4-FFF2-40B4-BE49-F238E27FC236}">
+              <a16:creationId xmlns:a16="http://schemas.microsoft.com/office/drawing/2014/main" id="{9D78E804-C062-BD0E-1FA9-DBDE199883F5}"/>
+            </a:ext>
+          </a:extLst>
+        </p:cNvPr>
+        <p:cNvGrpSpPr/>
+        <p:nvPr/>
+      </p:nvGrpSpPr>
+      <p:grpSpPr>
+        <a:xfrm>
+          <a:off x="0" y="0"/>
+          <a:ext cx="0" cy="0"/>
+          <a:chOff x="0" y="0"/>
+          <a:chExt cx="0" cy="0"/>
+        </a:xfrm>
+      </p:grpSpPr>
+      <p:sp>
+        <p:nvSpPr>
+          <p:cNvPr id="5" name="內容版面配置區 4">
+            <a:extLst>
+              <a:ext uri="{FF2B5EF4-FFF2-40B4-BE49-F238E27FC236}">
+                <a16:creationId xmlns:a16="http://schemas.microsoft.com/office/drawing/2014/main" id="{4D31B0EF-4F9F-2607-7996-7D6985490685}"/>
+              </a:ext>
+            </a:extLst>
+          </p:cNvPr>
+          <p:cNvSpPr>
+            <a:spLocks noGrp="1"/>
+          </p:cNvSpPr>
+          <p:nvPr>
+            <p:ph idx="1"/>
+          </p:nvPr>
+        </p:nvSpPr>
+        <p:spPr>
+          <a:xfrm>
+            <a:off x="0" y="1563638"/>
+            <a:ext cx="9144000" cy="1803647"/>
+          </a:xfrm>
+        </p:spPr>
+        <p:txBody>
+          <a:bodyPr anchor="ctr">
+            <a:normAutofit/>
+          </a:bodyPr>
+          <a:lstStyle/>
+          <a:p>
+            <a:pPr algn="ctr">
+              <a:buNone/>
+            </a:pPr>
+            <a:r>
+              <a:rPr lang="zh-CN" altLang="en-US" sz="4800" b="1" dirty="0">
+                <a:solidFill>
+                  <a:srgbClr val="660033"/>
+                </a:solidFill>
+                <a:latin typeface="微軟正黑體" pitchFamily="34" charset="-120"/>
+                <a:ea typeface="微軟正黑體" pitchFamily="34" charset="-120"/>
+              </a:rPr>
+              <a:t>我的救贖　我的幫助</a:t>
+            </a:r>
+            <a:endParaRPr lang="en-US" altLang="zh-CN" sz="4800" b="1" dirty="0">
+              <a:solidFill>
+                <a:srgbClr val="660033"/>
+              </a:solidFill>
+              <a:latin typeface="微軟正黑體" pitchFamily="34" charset="-120"/>
+              <a:ea typeface="微軟正黑體" pitchFamily="34" charset="-120"/>
+            </a:endParaRPr>
+          </a:p>
+          <a:p>
+            <a:pPr algn="ctr">
+              <a:buNone/>
+            </a:pPr>
+            <a:r>
+              <a:rPr lang="zh-CN" altLang="en-US" sz="4800" b="1" dirty="0">
+                <a:solidFill>
+                  <a:srgbClr val="660033"/>
+                </a:solidFill>
+                <a:latin typeface="微軟正黑體" pitchFamily="34" charset="-120"/>
+                <a:ea typeface="微軟正黑體" pitchFamily="34" charset="-120"/>
+              </a:rPr>
+              <a:t>哈利路亞</a:t>
+            </a:r>
+            <a:endParaRPr lang="zh-TW" altLang="en-US" sz="4800" b="1" dirty="0">
+              <a:solidFill>
+                <a:srgbClr val="660033"/>
+              </a:solidFill>
+              <a:latin typeface="微軟正黑體" pitchFamily="34" charset="-120"/>
+              <a:ea typeface="微軟正黑體" pitchFamily="34" charset="-120"/>
+            </a:endParaRPr>
+          </a:p>
+        </p:txBody>
+      </p:sp>
+      <p:sp>
+        <p:nvSpPr>
+          <p:cNvPr id="3" name="TextBox 2">
+            <a:extLst>
+              <a:ext uri="{FF2B5EF4-FFF2-40B4-BE49-F238E27FC236}">
+                <a16:creationId xmlns:a16="http://schemas.microsoft.com/office/drawing/2014/main" id="{E26D095D-C870-074C-3B69-FFB0064F238E}"/>
+              </a:ext>
+            </a:extLst>
+          </p:cNvPr>
+          <p:cNvSpPr txBox="1"/>
+          <p:nvPr/>
+        </p:nvSpPr>
+        <p:spPr>
+          <a:xfrm>
+            <a:off x="0" y="3795886"/>
+            <a:ext cx="9144000" cy="646331"/>
+          </a:xfrm>
+          <a:prstGeom prst="rect">
+            <a:avLst/>
+          </a:prstGeom>
+          <a:noFill/>
+        </p:spPr>
+        <p:txBody>
+          <a:bodyPr wrap="square" rtlCol="0">
+            <a:spAutoFit/>
+          </a:bodyPr>
+          <a:lstStyle/>
+          <a:p>
+            <a:pPr algn="ctr"/>
+            <a:r>
+              <a:rPr lang="en-US" sz="3600" b="1" dirty="0">
+                <a:solidFill>
+                  <a:srgbClr val="660033"/>
+                </a:solidFill>
+                <a:effectLst/>
+                <a:latin typeface="Microsoft JhengHei" panose="020B0604030504040204" pitchFamily="34" charset="-120"/>
+                <a:ea typeface="Microsoft JhengHei" panose="020B0604030504040204" pitchFamily="34" charset="-120"/>
+                <a:cs typeface="Microsoft Himalaya" panose="01010100010101010101" pitchFamily="2" charset="0"/>
+              </a:rPr>
+              <a:t>( </a:t>
+            </a:r>
+            <a:r>
+              <a:rPr lang="zh-CN" altLang="en-US" sz="3600" b="1" dirty="0">
+                <a:solidFill>
+                  <a:srgbClr val="660033"/>
+                </a:solidFill>
+                <a:effectLst/>
+                <a:latin typeface="Microsoft JhengHei" panose="020B0604030504040204" pitchFamily="34" charset="-120"/>
+                <a:ea typeface="Microsoft JhengHei" panose="020B0604030504040204" pitchFamily="34" charset="-120"/>
+                <a:cs typeface="Microsoft Himalaya" panose="01010100010101010101" pitchFamily="2" charset="0"/>
+              </a:rPr>
+              <a:t>結尾 </a:t>
+            </a:r>
+            <a:r>
+              <a:rPr lang="en-US" sz="3600" b="1" dirty="0">
+                <a:solidFill>
+                  <a:srgbClr val="660033"/>
+                </a:solidFill>
+                <a:effectLst/>
+                <a:latin typeface="Microsoft JhengHei" panose="020B0604030504040204" pitchFamily="34" charset="-120"/>
+                <a:ea typeface="Microsoft JhengHei" panose="020B0604030504040204" pitchFamily="34" charset="-120"/>
+                <a:cs typeface="Microsoft Himalaya" panose="01010100010101010101" pitchFamily="2" charset="0"/>
+              </a:rPr>
+              <a:t>)</a:t>
+            </a:r>
+            <a:endParaRPr lang="vi-VN" sz="3600" b="1" dirty="0">
+              <a:solidFill>
+                <a:srgbClr val="660033"/>
+              </a:solidFill>
+              <a:effectLst/>
+              <a:latin typeface="Microsoft JhengHei" panose="020B0604030504040204" pitchFamily="34" charset="-120"/>
+              <a:ea typeface="Microsoft JhengHei" panose="020B0604030504040204" pitchFamily="34" charset="-120"/>
+              <a:cs typeface="Microsoft Himalaya" panose="01010100010101010101" pitchFamily="2" charset="0"/>
+            </a:endParaRPr>
+          </a:p>
+        </p:txBody>
+      </p:sp>
+    </p:spTree>
+    <p:extLst>
+      <p:ext uri="{BB962C8B-B14F-4D97-AF65-F5344CB8AC3E}">
+        <p14:creationId xmlns:p14="http://schemas.microsoft.com/office/powerpoint/2010/main" val="4137414504"/>
       </p:ext>
     </p:extLst>
   </p:cSld>
@@ -3518,7 +3662,7 @@
               <a:buNone/>
             </a:pPr>
             <a:r>
-              <a:rPr lang="zh-TW" altLang="en-US" sz="4800" b="1" dirty="0" smtClean="0">
+              <a:rPr lang="zh-TW" altLang="en-US" sz="4800" b="1" dirty="0">
                 <a:solidFill>
                   <a:srgbClr val="660033"/>
                 </a:solidFill>
@@ -3527,7 +3671,7 @@
               </a:rPr>
               <a:t>全能真神祢掌權</a:t>
             </a:r>
-            <a:endParaRPr lang="en-US" altLang="zh-TW" sz="4800" b="1" dirty="0" smtClean="0">
+            <a:endParaRPr lang="en-US" altLang="zh-TW" sz="4800" b="1" dirty="0">
               <a:solidFill>
                 <a:srgbClr val="660033"/>
               </a:solidFill>
@@ -3540,7 +3684,7 @@
               <a:buNone/>
             </a:pPr>
             <a:r>
-              <a:rPr lang="zh-TW" altLang="en-US" sz="4800" b="1" dirty="0" smtClean="0">
+              <a:rPr lang="zh-TW" altLang="en-US" sz="4800" b="1" dirty="0">
                 <a:solidFill>
                   <a:srgbClr val="660033"/>
                 </a:solidFill>
@@ -3549,7 +3693,7 @@
               </a:rPr>
               <a:t>祢的慈愛永遠長存</a:t>
             </a:r>
-            <a:endParaRPr lang="en-US" altLang="zh-TW" sz="4800" b="1" dirty="0" smtClean="0">
+            <a:endParaRPr lang="en-US" altLang="zh-TW" sz="4800" b="1" dirty="0">
               <a:solidFill>
                 <a:srgbClr val="660033"/>
               </a:solidFill>
@@ -3604,7 +3748,7 @@
                 <a:ea typeface="Microsoft JhengHei" panose="020B0604030504040204" pitchFamily="34" charset="-120"/>
                 <a:cs typeface="Microsoft Himalaya" panose="01010100010101010101" pitchFamily="2" charset="0"/>
               </a:rPr>
-              <a:t>正 </a:t>
+              <a:t>正歌 </a:t>
             </a:r>
             <a:r>
               <a:rPr lang="en-US" sz="3600" b="1" dirty="0">
@@ -3695,13 +3839,6 @@
               </a:rPr>
               <a:t>萬民都來尊崇祢聖名</a:t>
             </a:r>
-            <a:endParaRPr lang="zh-TW" altLang="en-US" sz="4800" b="1" dirty="0">
-              <a:solidFill>
-                <a:srgbClr val="660033"/>
-              </a:solidFill>
-              <a:latin typeface="微軟正黑體" pitchFamily="34" charset="-120"/>
-              <a:ea typeface="微軟正黑體" pitchFamily="34" charset="-120"/>
-            </a:endParaRPr>
           </a:p>
         </p:txBody>
       </p:sp>
@@ -3733,7 +3870,6 @@
                 <a:solidFill>
                   <a:srgbClr val="660033"/>
                 </a:solidFill>
-                <a:effectLst/>
                 <a:latin typeface="Microsoft JhengHei" panose="020B0604030504040204" pitchFamily="34" charset="-120"/>
                 <a:ea typeface="Microsoft JhengHei" panose="020B0604030504040204" pitchFamily="34" charset="-120"/>
                 <a:cs typeface="Microsoft Himalaya" panose="01010100010101010101" pitchFamily="2" charset="0"/>
@@ -3745,19 +3881,17 @@
                 <a:solidFill>
                   <a:srgbClr val="660033"/>
                 </a:solidFill>
-                <a:effectLst/>
                 <a:latin typeface="Microsoft JhengHei" panose="020B0604030504040204" pitchFamily="34" charset="-120"/>
                 <a:ea typeface="Microsoft JhengHei" panose="020B0604030504040204" pitchFamily="34" charset="-120"/>
                 <a:cs typeface="Microsoft Himalaya" panose="01010100010101010101" pitchFamily="2" charset="0"/>
               </a:rPr>
-              <a:t>正 </a:t>
+              <a:t>正歌 </a:t>
             </a:r>
             <a:r>
               <a:rPr lang="en-US" sz="3600" b="1" dirty="0">
                 <a:solidFill>
                   <a:srgbClr val="660033"/>
                 </a:solidFill>
-                <a:effectLst/>
                 <a:latin typeface="Microsoft JhengHei" panose="020B0604030504040204" pitchFamily="34" charset="-120"/>
                 <a:ea typeface="Microsoft JhengHei" panose="020B0604030504040204" pitchFamily="34" charset="-120"/>
                 <a:cs typeface="Microsoft Himalaya" panose="01010100010101010101" pitchFamily="2" charset="0"/>
@@ -3768,7 +3902,6 @@
               <a:solidFill>
                 <a:srgbClr val="660033"/>
               </a:solidFill>
-              <a:effectLst/>
               <a:latin typeface="Microsoft JhengHei" panose="020B0604030504040204" pitchFamily="34" charset="-120"/>
               <a:ea typeface="Microsoft JhengHei" panose="020B0604030504040204" pitchFamily="34" charset="-120"/>
               <a:cs typeface="Microsoft Himalaya" panose="01010100010101010101" pitchFamily="2" charset="0"/>
@@ -3863,13 +3996,6 @@
               </a:rPr>
               <a:t>祢的慈愛永遠長存</a:t>
             </a:r>
-            <a:endParaRPr lang="zh-TW" altLang="en-US" sz="4800" b="1" dirty="0">
-              <a:solidFill>
-                <a:srgbClr val="660033"/>
-              </a:solidFill>
-              <a:latin typeface="微軟正黑體" pitchFamily="34" charset="-120"/>
-              <a:ea typeface="微軟正黑體" pitchFamily="34" charset="-120"/>
-            </a:endParaRPr>
           </a:p>
         </p:txBody>
       </p:sp>
@@ -3901,7 +4027,6 @@
                 <a:solidFill>
                   <a:srgbClr val="660033"/>
                 </a:solidFill>
-                <a:effectLst/>
                 <a:latin typeface="Microsoft JhengHei" panose="020B0604030504040204" pitchFamily="34" charset="-120"/>
                 <a:ea typeface="Microsoft JhengHei" panose="020B0604030504040204" pitchFamily="34" charset="-120"/>
                 <a:cs typeface="Microsoft Himalaya" panose="01010100010101010101" pitchFamily="2" charset="0"/>
@@ -3913,19 +4038,17 @@
                 <a:solidFill>
                   <a:srgbClr val="660033"/>
                 </a:solidFill>
-                <a:effectLst/>
                 <a:latin typeface="Microsoft JhengHei" panose="020B0604030504040204" pitchFamily="34" charset="-120"/>
                 <a:ea typeface="Microsoft JhengHei" panose="020B0604030504040204" pitchFamily="34" charset="-120"/>
                 <a:cs typeface="Microsoft Himalaya" panose="01010100010101010101" pitchFamily="2" charset="0"/>
               </a:rPr>
-              <a:t>正 </a:t>
+              <a:t>正歌 </a:t>
             </a:r>
             <a:r>
               <a:rPr lang="en-US" sz="3600" b="1" dirty="0">
                 <a:solidFill>
                   <a:srgbClr val="660033"/>
                 </a:solidFill>
-                <a:effectLst/>
                 <a:latin typeface="Microsoft JhengHei" panose="020B0604030504040204" pitchFamily="34" charset="-120"/>
                 <a:ea typeface="Microsoft JhengHei" panose="020B0604030504040204" pitchFamily="34" charset="-120"/>
                 <a:cs typeface="Microsoft Himalaya" panose="01010100010101010101" pitchFamily="2" charset="0"/>
@@ -3936,7 +4059,6 @@
               <a:solidFill>
                 <a:srgbClr val="660033"/>
               </a:solidFill>
-              <a:effectLst/>
               <a:latin typeface="Microsoft JhengHei" panose="020B0604030504040204" pitchFamily="34" charset="-120"/>
               <a:ea typeface="Microsoft JhengHei" panose="020B0604030504040204" pitchFamily="34" charset="-120"/>
               <a:cs typeface="Microsoft Himalaya" panose="01010100010101010101" pitchFamily="2" charset="0"/>
@@ -4009,13 +4131,6 @@
               </a:rPr>
               <a:t>榮耀的名直存到永遠</a:t>
             </a:r>
-            <a:endParaRPr lang="zh-TW" altLang="en-US" sz="4800" b="1" dirty="0">
-              <a:solidFill>
-                <a:srgbClr val="660033"/>
-              </a:solidFill>
-              <a:latin typeface="微軟正黑體" pitchFamily="34" charset="-120"/>
-              <a:ea typeface="微軟正黑體" pitchFamily="34" charset="-120"/>
-            </a:endParaRPr>
           </a:p>
         </p:txBody>
       </p:sp>
@@ -4047,7 +4162,6 @@
                 <a:solidFill>
                   <a:srgbClr val="660033"/>
                 </a:solidFill>
-                <a:effectLst/>
                 <a:latin typeface="Microsoft JhengHei" panose="020B0604030504040204" pitchFamily="34" charset="-120"/>
                 <a:ea typeface="Microsoft JhengHei" panose="020B0604030504040204" pitchFamily="34" charset="-120"/>
                 <a:cs typeface="Microsoft Himalaya" panose="01010100010101010101" pitchFamily="2" charset="0"/>
@@ -4059,19 +4173,17 @@
                 <a:solidFill>
                   <a:srgbClr val="660033"/>
                 </a:solidFill>
-                <a:effectLst/>
                 <a:latin typeface="Microsoft JhengHei" panose="020B0604030504040204" pitchFamily="34" charset="-120"/>
                 <a:ea typeface="Microsoft JhengHei" panose="020B0604030504040204" pitchFamily="34" charset="-120"/>
                 <a:cs typeface="Microsoft Himalaya" panose="01010100010101010101" pitchFamily="2" charset="0"/>
               </a:rPr>
-              <a:t>正 </a:t>
+              <a:t>正歌 </a:t>
             </a:r>
             <a:r>
               <a:rPr lang="en-US" sz="3600" b="1" dirty="0">
                 <a:solidFill>
                   <a:srgbClr val="660033"/>
                 </a:solidFill>
-                <a:effectLst/>
                 <a:latin typeface="Microsoft JhengHei" panose="020B0604030504040204" pitchFamily="34" charset="-120"/>
                 <a:ea typeface="Microsoft JhengHei" panose="020B0604030504040204" pitchFamily="34" charset="-120"/>
                 <a:cs typeface="Microsoft Himalaya" panose="01010100010101010101" pitchFamily="2" charset="0"/>
@@ -4082,7 +4194,6 @@
               <a:solidFill>
                 <a:srgbClr val="660033"/>
               </a:solidFill>
-              <a:effectLst/>
               <a:latin typeface="Microsoft JhengHei" panose="020B0604030504040204" pitchFamily="34" charset="-120"/>
               <a:ea typeface="Microsoft JhengHei" panose="020B0604030504040204" pitchFamily="34" charset="-120"/>
               <a:cs typeface="Microsoft Himalaya" panose="01010100010101010101" pitchFamily="2" charset="0"/>
@@ -4223,7 +4334,7 @@
               <a:t>( </a:t>
             </a:r>
             <a:r>
-              <a:rPr lang="zh-CN" altLang="en-US" sz="3600" b="1" dirty="0" smtClean="0">
+              <a:rPr lang="zh-CN" altLang="en-US" sz="3600" b="1" dirty="0">
                 <a:solidFill>
                   <a:srgbClr val="660033"/>
                 </a:solidFill>
@@ -4232,7 +4343,30 @@
                 <a:ea typeface="Microsoft JhengHei" panose="020B0604030504040204" pitchFamily="34" charset="-120"/>
                 <a:cs typeface="Microsoft Himalaya" panose="01010100010101010101" pitchFamily="2" charset="0"/>
               </a:rPr>
-              <a:t>副 </a:t>
+              <a:t>副</a:t>
+            </a:r>
+            <a:r>
+              <a:rPr lang="zh-CN" altLang="en-US" sz="3600" b="1" dirty="0">
+                <a:solidFill>
+                  <a:srgbClr val="660033"/>
+                </a:solidFill>
+                <a:latin typeface="Microsoft JhengHei" panose="020B0604030504040204" pitchFamily="34" charset="-120"/>
+                <a:ea typeface="Microsoft JhengHei" panose="020B0604030504040204" pitchFamily="34" charset="-120"/>
+                <a:cs typeface="Microsoft Himalaya" panose="01010100010101010101" pitchFamily="2" charset="0"/>
+              </a:rPr>
+              <a:t>歌</a:t>
+            </a:r>
+            <a:r>
+              <a:rPr lang="zh-CN" altLang="en-US" sz="3600" b="1" dirty="0">
+                <a:solidFill>
+                  <a:srgbClr val="660033"/>
+                </a:solidFill>
+                <a:effectLst/>
+                <a:latin typeface="Microsoft JhengHei" panose="020B0604030504040204" pitchFamily="34" charset="-120"/>
+                <a:ea typeface="Microsoft JhengHei" panose="020B0604030504040204" pitchFamily="34" charset="-120"/>
+                <a:cs typeface="Microsoft Himalaya" panose="01010100010101010101" pitchFamily="2" charset="0"/>
+              </a:rPr>
+              <a:t> </a:t>
             </a:r>
             <a:r>
               <a:rPr lang="en-US" sz="3600" b="1" dirty="0">
@@ -4321,17 +4455,7 @@
                 <a:latin typeface="微軟正黑體" pitchFamily="34" charset="-120"/>
                 <a:ea typeface="微軟正黑體" pitchFamily="34" charset="-120"/>
               </a:rPr>
-              <a:t>唯有祢永遠不改</a:t>
-            </a:r>
-            <a:r>
-              <a:rPr lang="zh-TW" altLang="en-US" sz="4800" b="1" dirty="0" smtClean="0">
-                <a:solidFill>
-                  <a:srgbClr val="660033"/>
-                </a:solidFill>
-                <a:latin typeface="微軟正黑體" pitchFamily="34" charset="-120"/>
-                <a:ea typeface="微軟正黑體" pitchFamily="34" charset="-120"/>
-              </a:rPr>
-              <a:t>變</a:t>
+              <a:t>唯有祢永遠不改變</a:t>
             </a:r>
             <a:endParaRPr lang="zh-TW" altLang="en-US" sz="5400" b="1" dirty="0">
               <a:solidFill>
@@ -4371,7 +4495,6 @@
                 <a:solidFill>
                   <a:srgbClr val="660033"/>
                 </a:solidFill>
-                <a:effectLst/>
                 <a:latin typeface="Microsoft JhengHei" panose="020B0604030504040204" pitchFamily="34" charset="-120"/>
                 <a:ea typeface="Microsoft JhengHei" panose="020B0604030504040204" pitchFamily="34" charset="-120"/>
                 <a:cs typeface="Microsoft Himalaya" panose="01010100010101010101" pitchFamily="2" charset="0"/>
@@ -4379,23 +4502,21 @@
               <a:t>( </a:t>
             </a:r>
             <a:r>
-              <a:rPr lang="zh-CN" altLang="en-US" sz="3600" b="1" dirty="0" smtClean="0">
-                <a:solidFill>
-                  <a:srgbClr val="660033"/>
-                </a:solidFill>
-                <a:effectLst/>
+              <a:rPr lang="zh-CN" altLang="en-US" sz="3600" b="1" dirty="0">
+                <a:solidFill>
+                  <a:srgbClr val="660033"/>
+                </a:solidFill>
                 <a:latin typeface="Microsoft JhengHei" panose="020B0604030504040204" pitchFamily="34" charset="-120"/>
                 <a:ea typeface="Microsoft JhengHei" panose="020B0604030504040204" pitchFamily="34" charset="-120"/>
                 <a:cs typeface="Microsoft Himalaya" panose="01010100010101010101" pitchFamily="2" charset="0"/>
               </a:rPr>
-              <a:t>副 </a:t>
+              <a:t>副歌 </a:t>
             </a:r>
             <a:r>
               <a:rPr lang="en-US" sz="3600" b="1" dirty="0">
                 <a:solidFill>
                   <a:srgbClr val="660033"/>
                 </a:solidFill>
-                <a:effectLst/>
                 <a:latin typeface="Microsoft JhengHei" panose="020B0604030504040204" pitchFamily="34" charset="-120"/>
                 <a:ea typeface="Microsoft JhengHei" panose="020B0604030504040204" pitchFamily="34" charset="-120"/>
                 <a:cs typeface="Microsoft Himalaya" panose="01010100010101010101" pitchFamily="2" charset="0"/>
@@ -4406,7 +4527,6 @@
               <a:solidFill>
                 <a:srgbClr val="660033"/>
               </a:solidFill>
-              <a:effectLst/>
               <a:latin typeface="Microsoft JhengHei" panose="020B0604030504040204" pitchFamily="34" charset="-120"/>
               <a:ea typeface="Microsoft JhengHei" panose="020B0604030504040204" pitchFamily="34" charset="-120"/>
               <a:cs typeface="Microsoft Himalaya" panose="01010100010101010101" pitchFamily="2" charset="0"/>
@@ -4539,7 +4659,6 @@
                 <a:solidFill>
                   <a:srgbClr val="660033"/>
                 </a:solidFill>
-                <a:effectLst/>
                 <a:latin typeface="Microsoft JhengHei" panose="020B0604030504040204" pitchFamily="34" charset="-120"/>
                 <a:ea typeface="Microsoft JhengHei" panose="020B0604030504040204" pitchFamily="34" charset="-120"/>
                 <a:cs typeface="Microsoft Himalaya" panose="01010100010101010101" pitchFamily="2" charset="0"/>
@@ -4547,23 +4666,21 @@
               <a:t>( </a:t>
             </a:r>
             <a:r>
-              <a:rPr lang="zh-CN" altLang="en-US" sz="3600" b="1" dirty="0" smtClean="0">
-                <a:solidFill>
-                  <a:srgbClr val="660033"/>
-                </a:solidFill>
-                <a:effectLst/>
+              <a:rPr lang="zh-CN" altLang="en-US" sz="3600" b="1" dirty="0">
+                <a:solidFill>
+                  <a:srgbClr val="660033"/>
+                </a:solidFill>
                 <a:latin typeface="Microsoft JhengHei" panose="020B0604030504040204" pitchFamily="34" charset="-120"/>
                 <a:ea typeface="Microsoft JhengHei" panose="020B0604030504040204" pitchFamily="34" charset="-120"/>
                 <a:cs typeface="Microsoft Himalaya" panose="01010100010101010101" pitchFamily="2" charset="0"/>
               </a:rPr>
-              <a:t>副 </a:t>
+              <a:t>副歌 </a:t>
             </a:r>
             <a:r>
               <a:rPr lang="en-US" sz="3600" b="1" dirty="0">
                 <a:solidFill>
                   <a:srgbClr val="660033"/>
                 </a:solidFill>
-                <a:effectLst/>
                 <a:latin typeface="Microsoft JhengHei" panose="020B0604030504040204" pitchFamily="34" charset="-120"/>
                 <a:ea typeface="Microsoft JhengHei" panose="020B0604030504040204" pitchFamily="34" charset="-120"/>
                 <a:cs typeface="Microsoft Himalaya" panose="01010100010101010101" pitchFamily="2" charset="0"/>
@@ -4574,7 +4691,6 @@
               <a:solidFill>
                 <a:srgbClr val="660033"/>
               </a:solidFill>
-              <a:effectLst/>
               <a:latin typeface="Microsoft JhengHei" panose="020B0604030504040204" pitchFamily="34" charset="-120"/>
               <a:ea typeface="Microsoft JhengHei" panose="020B0604030504040204" pitchFamily="34" charset="-120"/>
               <a:cs typeface="Microsoft Himalaya" panose="01010100010101010101" pitchFamily="2" charset="0"/>
@@ -4647,13 +4763,6 @@
               </a:rPr>
               <a:t>所有榮耀都歸於祢</a:t>
             </a:r>
-            <a:endParaRPr lang="zh-TW" altLang="en-US" sz="4800" b="1" dirty="0">
-              <a:solidFill>
-                <a:srgbClr val="660033"/>
-              </a:solidFill>
-              <a:latin typeface="微軟正黑體" pitchFamily="34" charset="-120"/>
-              <a:ea typeface="微軟正黑體" pitchFamily="34" charset="-120"/>
-            </a:endParaRPr>
           </a:p>
         </p:txBody>
       </p:sp>
@@ -4685,7 +4794,6 @@
                 <a:solidFill>
                   <a:srgbClr val="660033"/>
                 </a:solidFill>
-                <a:effectLst/>
                 <a:latin typeface="Microsoft JhengHei" panose="020B0604030504040204" pitchFamily="34" charset="-120"/>
                 <a:ea typeface="Microsoft JhengHei" panose="020B0604030504040204" pitchFamily="34" charset="-120"/>
                 <a:cs typeface="Microsoft Himalaya" panose="01010100010101010101" pitchFamily="2" charset="0"/>
@@ -4693,23 +4801,21 @@
               <a:t>( </a:t>
             </a:r>
             <a:r>
-              <a:rPr lang="zh-CN" altLang="en-US" sz="3600" b="1" dirty="0" smtClean="0">
-                <a:solidFill>
-                  <a:srgbClr val="660033"/>
-                </a:solidFill>
-                <a:effectLst/>
+              <a:rPr lang="zh-CN" altLang="en-US" sz="3600" b="1" dirty="0">
+                <a:solidFill>
+                  <a:srgbClr val="660033"/>
+                </a:solidFill>
                 <a:latin typeface="Microsoft JhengHei" panose="020B0604030504040204" pitchFamily="34" charset="-120"/>
                 <a:ea typeface="Microsoft JhengHei" panose="020B0604030504040204" pitchFamily="34" charset="-120"/>
                 <a:cs typeface="Microsoft Himalaya" panose="01010100010101010101" pitchFamily="2" charset="0"/>
               </a:rPr>
-              <a:t>副 </a:t>
+              <a:t>副歌 </a:t>
             </a:r>
             <a:r>
               <a:rPr lang="en-US" sz="3600" b="1" dirty="0">
                 <a:solidFill>
                   <a:srgbClr val="660033"/>
                 </a:solidFill>
-                <a:effectLst/>
                 <a:latin typeface="Microsoft JhengHei" panose="020B0604030504040204" pitchFamily="34" charset="-120"/>
                 <a:ea typeface="Microsoft JhengHei" panose="020B0604030504040204" pitchFamily="34" charset="-120"/>
                 <a:cs typeface="Microsoft Himalaya" panose="01010100010101010101" pitchFamily="2" charset="0"/>
@@ -4720,7 +4826,6 @@
               <a:solidFill>
                 <a:srgbClr val="660033"/>
               </a:solidFill>
-              <a:effectLst/>
               <a:latin typeface="Microsoft JhengHei" panose="020B0604030504040204" pitchFamily="34" charset="-120"/>
               <a:ea typeface="Microsoft JhengHei" panose="020B0604030504040204" pitchFamily="34" charset="-120"/>
               <a:cs typeface="Microsoft Himalaya" panose="01010100010101010101" pitchFamily="2" charset="0"/>
